--- a/parallelism_selection.pptx
+++ b/parallelism_selection.pptx
@@ -20,6 +20,8 @@
     <p:sldId id="265" r:id="rId11"/>
     <p:sldId id="266" r:id="rId12"/>
     <p:sldId id="267" r:id="rId13"/>
+    <p:sldId id="275" r:id="rId26"/>
+    <p:sldId id="276" r:id="rId27"/>
     <p:sldId id="268" r:id="rId14"/>
     <p:sldId id="269" r:id="rId15"/>
     <p:sldId id="270" r:id="rId16"/>
@@ -16489,7 +16491,7 @@
           <a:lstStyle/>
           <a:p>
             <a:fld id="{DB7BEEEC-A170-5376-2B6E-CB54687B0CB1}" type="slidenum">
-              <a:t>13</a:t>
+              <a:t>15</a:t>
             </a:fld>
             <a:endParaRPr/>
           </a:p>
@@ -17971,7 +17973,7 @@
           <a:lstStyle/>
           <a:p>
             <a:fld id="{30394428-F1DC-E5F6-DB0C-7DE31F3D8A23}" type="slidenum">
-              <a:t>14</a:t>
+              <a:t>16</a:t>
             </a:fld>
             <a:endParaRPr/>
           </a:p>
@@ -19156,7 +19158,7 @@
           <a:lstStyle/>
           <a:p>
             <a:fld id="{4DB16885-0D3F-A391-B669-3211DB3B26E8}" type="slidenum">
-              <a:t>15</a:t>
+              <a:t>17</a:t>
             </a:fld>
             <a:endParaRPr/>
           </a:p>
@@ -20389,7 +20391,7 @@
           <a:lstStyle/>
           <a:p>
             <a:fld id="{2DD23107-4986-8758-3A93-3D74F35908CC}" type="slidenum">
-              <a:t>16</a:t>
+              <a:t>18</a:t>
             </a:fld>
             <a:endParaRPr/>
           </a:p>
@@ -21618,7 +21620,7 @@
           <a:lstStyle/>
           <a:p>
             <a:fld id="{327921A4-25C4-3DB4-06B1-32693CEE2241}" type="slidenum">
-              <a:t>17</a:t>
+              <a:t>19</a:t>
             </a:fld>
             <a:endParaRPr/>
           </a:p>
@@ -23394,7 +23396,7 @@
           <a:lstStyle/>
           <a:p>
             <a:fld id="{EA83FA91-883A-0168-8075-96CEB9DCA3C2}" type="slidenum">
-              <a:t>18</a:t>
+              <a:t>20</a:t>
             </a:fld>
             <a:endParaRPr/>
           </a:p>
@@ -24905,7 +24907,7 @@
           <a:lstStyle/>
           <a:p>
             <a:fld id="{DC9C7607-4BA3-B4DC-A00F-2E67A9FCFF7E}" type="slidenum">
-              <a:t>19</a:t>
+              <a:t>21</a:t>
             </a:fld>
             <a:endParaRPr/>
           </a:p>
@@ -27377,6 +27379,2086 @@
         <p14:creationId xmlns:p14="http://schemas.microsoft.com/office/powerpoint/2010/main" val="2452457733"/>
       </p:ext>
     </p:extLst>
+  </p:cSld>
+  <p:clrMapOvr>
+    <a:masterClrMapping/>
+  </p:clrMapOvr>
+</p:sld>
+</file>
+
+<file path=ppt/slides/slide20.xml><?xml version="1.0" encoding="utf-8"?>
+<p:sld xmlns:a="http://schemas.openxmlformats.org/drawingml/2006/main" xmlns:r="http://schemas.openxmlformats.org/officeDocument/2006/relationships" xmlns:p="http://schemas.openxmlformats.org/presentationml/2006/main">
+  <p:cSld name="Slide 1">
+    <p:spTree>
+      <p:nvGrpSpPr>
+        <p:cNvPr id="1" name=""/>
+        <p:cNvGrpSpPr/>
+        <p:nvPr/>
+      </p:nvGrpSpPr>
+      <p:grpSpPr>
+        <a:xfrm>
+          <a:off x="0" y="0"/>
+          <a:ext cx="0" cy="0"/>
+          <a:chOff x="0" y="0"/>
+          <a:chExt cx="0" cy="0"/>
+        </a:xfrm>
+      </p:grpSpPr>
+      <p:sp>
+        <p:nvSpPr>
+          <p:cNvPr id="2" name="Text 0"/>
+          <p:cNvSpPr/>
+          <p:nvPr/>
+        </p:nvSpPr>
+        <p:spPr>
+          <a:xfrm>
+            <a:off x="658368" y="310896"/>
+            <a:ext cx="10835640" cy="566928"/>
+          </a:xfrm>
+          <a:prstGeom prst="rect">
+            <a:avLst/>
+          </a:prstGeom>
+          <a:noFill/>
+          <a:ln/>
+        </p:spPr>
+        <p:txBody>
+          <a:bodyPr wrap="square" lIns="0" tIns="0" rIns="0" bIns="0" rtlCol="0" anchor="ctr">
+            <a:normAutofit/>
+          </a:bodyPr>
+          <a:lstStyle/>
+          <a:p>
+            <a:pPr algn="l" indent="0" marL="0">
+              <a:buNone/>
+            </a:pPr>
+            <a:r>
+              <a:rPr lang="en-US" sz="2800" dirty="0">
+                <a:solidFill>
+                  <a:srgbClr val="333639"/>
+                </a:solidFill>
+                <a:latin typeface="FlandersArtSans-Regular" pitchFamily="34" charset="0"/>
+                <a:ea typeface="FlandersArtSans-Regular" pitchFamily="34" charset="-122"/>
+                <a:cs typeface="FlandersArtSans-Regular" pitchFamily="34" charset="-120"/>
+              </a:rPr>
+              <a:t>Training offload moves state out of scarce GPU memory</a:t>
+            </a:r>
+            <a:endParaRPr lang="en-US" sz="2800" dirty="0"/>
+          </a:p>
+        </p:txBody>
+      </p:sp>
+      <p:sp>
+        <p:nvSpPr>
+          <p:cNvPr id="3" name="Text 1"/>
+          <p:cNvSpPr/>
+          <p:nvPr/>
+        </p:nvSpPr>
+        <p:spPr>
+          <a:xfrm>
+            <a:off x="658368" y="1133856"/>
+            <a:ext cx="2971800" cy="228600"/>
+          </a:xfrm>
+          <a:prstGeom prst="rect">
+            <a:avLst/>
+          </a:prstGeom>
+          <a:noFill/>
+          <a:ln/>
+        </p:spPr>
+        <p:txBody>
+          <a:bodyPr wrap="square" lIns="0" tIns="0" rIns="0" bIns="0" rtlCol="0" anchor="ctr">
+            <a:normAutofit/>
+          </a:bodyPr>
+          <a:lstStyle/>
+          <a:p>
+            <a:pPr algn="l" indent="0" marL="0">
+              <a:buNone/>
+            </a:pPr>
+            <a:r>
+              <a:rPr lang="en-US" sz="1600" b="1" dirty="0">
+                <a:solidFill>
+                  <a:srgbClr val="DB6C30"/>
+                </a:solidFill>
+                <a:latin typeface="FlandersArtSans-Bold" pitchFamily="34" charset="0"/>
+                <a:ea typeface="FlandersArtSans-Bold" pitchFamily="34" charset="-122"/>
+                <a:cs typeface="FlandersArtSans-Bold" pitchFamily="34" charset="-120"/>
+              </a:rPr>
+              <a:t>OFFLOADS</a:t>
+            </a:r>
+            <a:endParaRPr lang="en-US" sz="1600" dirty="0"/>
+          </a:p>
+        </p:txBody>
+      </p:sp>
+      <p:sp>
+        <p:nvSpPr>
+          <p:cNvPr id="4" name="Text 2"/>
+          <p:cNvSpPr/>
+          <p:nvPr/>
+        </p:nvSpPr>
+        <p:spPr>
+          <a:xfrm>
+            <a:off x="658368" y="1389888"/>
+            <a:ext cx="2971800" cy="640080"/>
+          </a:xfrm>
+          <a:prstGeom prst="rect">
+            <a:avLst/>
+          </a:prstGeom>
+          <a:noFill/>
+          <a:ln/>
+        </p:spPr>
+        <p:txBody>
+          <a:bodyPr wrap="square" lIns="0" tIns="0" rIns="0" bIns="0" rtlCol="0" anchor="t">
+            <a:normAutofit/>
+          </a:bodyPr>
+          <a:lstStyle/>
+          <a:p>
+            <a:pPr algn="l" indent="0" marL="0">
+              <a:buNone/>
+            </a:pPr>
+            <a:r>
+              <a:rPr lang="en-US" sz="1600" dirty="0">
+                <a:solidFill>
+                  <a:srgbClr val="333639"/>
+                </a:solidFill>
+                <a:latin typeface="FlandersArtSans-Regular" pitchFamily="34" charset="0"/>
+                <a:ea typeface="FlandersArtSans-Regular" pitchFamily="34" charset="-122"/>
+                <a:cs typeface="FlandersArtSans-Regular" pitchFamily="34" charset="-120"/>
+              </a:rPr>
+              <a:t>Optimizer state and optimizer work first; optionally parameters and gradients.</a:t>
+            </a:r>
+            <a:endParaRPr lang="en-US" sz="1600" dirty="0"/>
+          </a:p>
+        </p:txBody>
+      </p:sp>
+      <p:sp>
+        <p:nvSpPr>
+          <p:cNvPr id="5" name="Shape 3"/>
+          <p:cNvSpPr/>
+          <p:nvPr/>
+        </p:nvSpPr>
+        <p:spPr>
+          <a:xfrm>
+            <a:off x="658368" y="2103120"/>
+            <a:ext cx="2971800" cy="0"/>
+          </a:xfrm>
+          <a:prstGeom prst="line">
+            <a:avLst/>
+          </a:prstGeom>
+          <a:noFill/>
+          <a:ln w="12700">
+            <a:solidFill>
+              <a:srgbClr val="C7CBD2"/>
+            </a:solidFill>
+            <a:prstDash val="solid"/>
+          </a:ln>
+        </p:spPr>
+      </p:sp>
+      <p:sp>
+        <p:nvSpPr>
+          <p:cNvPr id="6" name="Text 4"/>
+          <p:cNvSpPr/>
+          <p:nvPr/>
+        </p:nvSpPr>
+        <p:spPr>
+          <a:xfrm>
+            <a:off x="658368" y="2249424"/>
+            <a:ext cx="2971800" cy="228600"/>
+          </a:xfrm>
+          <a:prstGeom prst="rect">
+            <a:avLst/>
+          </a:prstGeom>
+          <a:noFill/>
+          <a:ln/>
+        </p:spPr>
+        <p:txBody>
+          <a:bodyPr wrap="square" lIns="0" tIns="0" rIns="0" bIns="0" rtlCol="0" anchor="ctr">
+            <a:normAutofit/>
+          </a:bodyPr>
+          <a:lstStyle/>
+          <a:p>
+            <a:pPr algn="l" indent="0" marL="0">
+              <a:buNone/>
+            </a:pPr>
+            <a:r>
+              <a:rPr lang="en-US" sz="1600" b="1" dirty="0">
+                <a:solidFill>
+                  <a:srgbClr val="DB6C30"/>
+                </a:solidFill>
+                <a:latin typeface="FlandersArtSans-Bold" pitchFamily="34" charset="0"/>
+                <a:ea typeface="FlandersArtSans-Bold" pitchFamily="34" charset="-122"/>
+                <a:cs typeface="FlandersArtSans-Bold" pitchFamily="34" charset="-120"/>
+              </a:rPr>
+              <a:t>HOW IT WORKS</a:t>
+            </a:r>
+            <a:endParaRPr lang="en-US" sz="1600" dirty="0"/>
+          </a:p>
+        </p:txBody>
+      </p:sp>
+      <p:sp>
+        <p:nvSpPr>
+          <p:cNvPr id="7" name="Text 5"/>
+          <p:cNvSpPr/>
+          <p:nvPr/>
+        </p:nvSpPr>
+        <p:spPr>
+          <a:xfrm>
+            <a:off x="658368" y="2505456"/>
+            <a:ext cx="2971800" cy="896112"/>
+          </a:xfrm>
+          <a:prstGeom prst="rect">
+            <a:avLst/>
+          </a:prstGeom>
+          <a:noFill/>
+          <a:ln/>
+        </p:spPr>
+        <p:txBody>
+          <a:bodyPr wrap="square" lIns="0" tIns="0" rIns="0" bIns="0" rtlCol="0" anchor="t">
+            <a:normAutofit/>
+          </a:bodyPr>
+          <a:lstStyle/>
+          <a:p>
+            <a:pPr algn="l" indent="0" marL="0">
+              <a:buNone/>
+            </a:pPr>
+            <a:r>
+              <a:rPr lang="en-US" sz="1600" dirty="0">
+                <a:solidFill>
+                  <a:srgbClr val="333639"/>
+                </a:solidFill>
+                <a:latin typeface="FlandersArtSans-Regular" pitchFamily="34" charset="0"/>
+                <a:ea typeface="FlandersArtSans-Regular" pitchFamily="34" charset="-122"/>
+                <a:cs typeface="FlandersArtSans-Regular" pitchFamily="34" charset="-120"/>
+              </a:rPr>
+              <a:t>The GPU runs forward and backward. FSDP or ZeRO stages state through host memory when it is needed.</a:t>
+            </a:r>
+            <a:endParaRPr lang="en-US" sz="1600" dirty="0"/>
+          </a:p>
+        </p:txBody>
+      </p:sp>
+      <p:sp>
+        <p:nvSpPr>
+          <p:cNvPr id="8" name="Shape 6"/>
+          <p:cNvSpPr/>
+          <p:nvPr/>
+        </p:nvSpPr>
+        <p:spPr>
+          <a:xfrm>
+            <a:off x="658368" y="3419856"/>
+            <a:ext cx="2971800" cy="0"/>
+          </a:xfrm>
+          <a:prstGeom prst="line">
+            <a:avLst/>
+          </a:prstGeom>
+          <a:noFill/>
+          <a:ln w="12700">
+            <a:solidFill>
+              <a:srgbClr val="C7CBD2"/>
+            </a:solidFill>
+            <a:prstDash val="solid"/>
+          </a:ln>
+        </p:spPr>
+      </p:sp>
+      <p:sp>
+        <p:nvSpPr>
+          <p:cNvPr id="9" name="Text 7"/>
+          <p:cNvSpPr/>
+          <p:nvPr/>
+        </p:nvSpPr>
+        <p:spPr>
+          <a:xfrm>
+            <a:off x="658368" y="3566160"/>
+            <a:ext cx="2971800" cy="228600"/>
+          </a:xfrm>
+          <a:prstGeom prst="rect">
+            <a:avLst/>
+          </a:prstGeom>
+          <a:noFill/>
+          <a:ln/>
+        </p:spPr>
+        <p:txBody>
+          <a:bodyPr wrap="square" lIns="0" tIns="0" rIns="0" bIns="0" rtlCol="0" anchor="ctr">
+            <a:normAutofit/>
+          </a:bodyPr>
+          <a:lstStyle/>
+          <a:p>
+            <a:pPr algn="l" indent="0" marL="0">
+              <a:buNone/>
+            </a:pPr>
+            <a:r>
+              <a:rPr lang="en-US" sz="1600" b="1" dirty="0">
+                <a:solidFill>
+                  <a:srgbClr val="DB6C30"/>
+                </a:solidFill>
+                <a:latin typeface="FlandersArtSans-Bold" pitchFamily="34" charset="0"/>
+                <a:ea typeface="FlandersArtSans-Bold" pitchFamily="34" charset="-122"/>
+                <a:cs typeface="FlandersArtSans-Bold" pitchFamily="34" charset="-120"/>
+              </a:rPr>
+              <a:t>MAIN COST</a:t>
+            </a:r>
+            <a:endParaRPr lang="en-US" sz="1600" dirty="0"/>
+          </a:p>
+        </p:txBody>
+      </p:sp>
+      <p:sp>
+        <p:nvSpPr>
+          <p:cNvPr id="10" name="Text 8"/>
+          <p:cNvSpPr/>
+          <p:nvPr/>
+        </p:nvSpPr>
+        <p:spPr>
+          <a:xfrm>
+            <a:off x="658368" y="3822192"/>
+            <a:ext cx="2971800" cy="749808"/>
+          </a:xfrm>
+          <a:prstGeom prst="rect">
+            <a:avLst/>
+          </a:prstGeom>
+          <a:noFill/>
+          <a:ln/>
+        </p:spPr>
+        <p:txBody>
+          <a:bodyPr wrap="square" lIns="0" tIns="0" rIns="0" bIns="0" rtlCol="0" anchor="t">
+            <a:normAutofit/>
+          </a:bodyPr>
+          <a:lstStyle/>
+          <a:p>
+            <a:pPr algn="l" indent="0" marL="0">
+              <a:buNone/>
+            </a:pPr>
+            <a:r>
+              <a:rPr lang="en-US" sz="1600" dirty="0">
+                <a:solidFill>
+                  <a:srgbClr val="333639"/>
+                </a:solidFill>
+                <a:latin typeface="FlandersArtSans-Regular" pitchFamily="34" charset="0"/>
+                <a:ea typeface="FlandersArtSans-Regular" pitchFamily="34" charset="-122"/>
+                <a:cs typeface="FlandersArtSans-Regular" pitchFamily="34" charset="-120"/>
+              </a:rPr>
+              <a:t>Host-device traffic, CPU work, and pressure on host RAM and link bandwidth.</a:t>
+            </a:r>
+            <a:endParaRPr lang="en-US" sz="1600" dirty="0"/>
+          </a:p>
+        </p:txBody>
+      </p:sp>
+      <p:sp>
+        <p:nvSpPr>
+          <p:cNvPr id="11" name="Text 9"/>
+          <p:cNvSpPr/>
+          <p:nvPr/>
+        </p:nvSpPr>
+        <p:spPr>
+          <a:xfrm>
+            <a:off x="658368" y="4709160"/>
+            <a:ext cx="2971800" cy="1024128"/>
+          </a:xfrm>
+          <a:prstGeom prst="rect">
+            <a:avLst/>
+          </a:prstGeom>
+          <a:noFill/>
+          <a:ln/>
+        </p:spPr>
+        <p:txBody>
+          <a:bodyPr wrap="square" lIns="0" tIns="0" rIns="0" bIns="0" rtlCol="0" anchor="t">
+            <a:normAutofit/>
+          </a:bodyPr>
+          <a:lstStyle/>
+          <a:p>
+            <a:pPr algn="l" indent="0" marL="0">
+              <a:buNone/>
+            </a:pPr>
+            <a:r>
+              <a:rPr lang="en-US" sz="1600" b="1" dirty="0">
+                <a:solidFill>
+                  <a:srgbClr val="DB6C30"/>
+                </a:solidFill>
+                <a:latin typeface="FlandersArtSans-Bold" pitchFamily="34" charset="0"/>
+                <a:ea typeface="FlandersArtSans-Bold" pitchFamily="34" charset="-122"/>
+                <a:cs typeface="FlandersArtSans-Bold" pitchFamily="34" charset="-120"/>
+              </a:rPr>
+              <a:t>Use when: sharding and checkpointing still do not fit, and capacity matters more than step time.</a:t>
+            </a:r>
+            <a:endParaRPr lang="en-US" sz="1600" dirty="0"/>
+          </a:p>
+        </p:txBody>
+      </p:sp>
+      <p:sp>
+        <p:nvSpPr>
+          <p:cNvPr id="12" name="Text 10"/>
+          <p:cNvSpPr/>
+          <p:nvPr/>
+        </p:nvSpPr>
+        <p:spPr>
+          <a:xfrm>
+            <a:off x="4187952" y="1143000"/>
+            <a:ext cx="2907792" cy="274320"/>
+          </a:xfrm>
+          <a:prstGeom prst="rect">
+            <a:avLst/>
+          </a:prstGeom>
+          <a:noFill/>
+          <a:ln/>
+        </p:spPr>
+        <p:txBody>
+          <a:bodyPr wrap="square" lIns="0" tIns="0" rIns="0" bIns="0" rtlCol="0" anchor="ctr">
+            <a:normAutofit/>
+          </a:bodyPr>
+          <a:lstStyle/>
+          <a:p>
+            <a:pPr algn="ctr" indent="0" marL="0">
+              <a:buNone/>
+            </a:pPr>
+            <a:r>
+              <a:rPr lang="en-US" sz="1600" b="1" dirty="0">
+                <a:solidFill>
+                  <a:srgbClr val="656A70"/>
+                </a:solidFill>
+                <a:latin typeface="FlandersArtSans-Bold" pitchFamily="34" charset="0"/>
+                <a:ea typeface="FlandersArtSans-Bold" pitchFamily="34" charset="-122"/>
+                <a:cs typeface="FlandersArtSans-Bold" pitchFamily="34" charset="-120"/>
+              </a:rPr>
+              <a:t>HOST RAM</a:t>
+            </a:r>
+            <a:endParaRPr lang="en-US" sz="1600" dirty="0"/>
+          </a:p>
+        </p:txBody>
+      </p:sp>
+      <p:sp>
+        <p:nvSpPr>
+          <p:cNvPr id="13" name="Text 11"/>
+          <p:cNvSpPr/>
+          <p:nvPr/>
+        </p:nvSpPr>
+        <p:spPr>
+          <a:xfrm>
+            <a:off x="8357616" y="1143000"/>
+            <a:ext cx="2852928" cy="274320"/>
+          </a:xfrm>
+          <a:prstGeom prst="rect">
+            <a:avLst/>
+          </a:prstGeom>
+          <a:noFill/>
+          <a:ln/>
+        </p:spPr>
+        <p:txBody>
+          <a:bodyPr wrap="square" lIns="0" tIns="0" rIns="0" bIns="0" rtlCol="0" anchor="ctr">
+            <a:normAutofit/>
+          </a:bodyPr>
+          <a:lstStyle/>
+          <a:p>
+            <a:pPr algn="ctr" indent="0" marL="0">
+              <a:buNone/>
+            </a:pPr>
+            <a:r>
+              <a:rPr lang="en-US" sz="1600" b="1" dirty="0">
+                <a:solidFill>
+                  <a:srgbClr val="656A70"/>
+                </a:solidFill>
+                <a:latin typeface="FlandersArtSans-Bold" pitchFamily="34" charset="0"/>
+                <a:ea typeface="FlandersArtSans-Bold" pitchFamily="34" charset="-122"/>
+                <a:cs typeface="FlandersArtSans-Bold" pitchFamily="34" charset="-120"/>
+              </a:rPr>
+              <a:t>GPU HBM</a:t>
+            </a:r>
+            <a:endParaRPr lang="en-US" sz="1600" dirty="0"/>
+          </a:p>
+        </p:txBody>
+      </p:sp>
+      <p:sp>
+        <p:nvSpPr>
+          <p:cNvPr id="14" name="Shape 12"/>
+          <p:cNvSpPr/>
+          <p:nvPr/>
+        </p:nvSpPr>
+        <p:spPr>
+          <a:xfrm>
+            <a:off x="4187952" y="1481328"/>
+            <a:ext cx="2907792" cy="3584448"/>
+          </a:xfrm>
+          <a:prstGeom prst="rect">
+            <a:avLst/>
+          </a:prstGeom>
+          <a:solidFill>
+            <a:srgbClr val="ECEEF1"/>
+          </a:solidFill>
+          <a:ln w="12700">
+            <a:solidFill>
+              <a:srgbClr val="C7CBD2"/>
+            </a:solidFill>
+            <a:prstDash val="solid"/>
+          </a:ln>
+        </p:spPr>
+      </p:sp>
+      <p:sp>
+        <p:nvSpPr>
+          <p:cNvPr id="15" name="Shape 13"/>
+          <p:cNvSpPr/>
+          <p:nvPr/>
+        </p:nvSpPr>
+        <p:spPr>
+          <a:xfrm>
+            <a:off x="8357616" y="1481328"/>
+            <a:ext cx="2852928" cy="3584448"/>
+          </a:xfrm>
+          <a:prstGeom prst="rect">
+            <a:avLst/>
+          </a:prstGeom>
+          <a:solidFill>
+            <a:srgbClr val="FCF3ED"/>
+          </a:solidFill>
+          <a:ln w="15240">
+            <a:solidFill>
+              <a:srgbClr val="DB6C30"/>
+            </a:solidFill>
+            <a:prstDash val="solid"/>
+          </a:ln>
+        </p:spPr>
+      </p:sp>
+      <p:sp>
+        <p:nvSpPr>
+          <p:cNvPr id="16" name="Shape 14"/>
+          <p:cNvSpPr/>
+          <p:nvPr/>
+        </p:nvSpPr>
+        <p:spPr>
+          <a:xfrm>
+            <a:off x="4507992" y="1828800"/>
+            <a:ext cx="2267712" cy="822960"/>
+          </a:xfrm>
+          <a:prstGeom prst="rect">
+            <a:avLst/>
+          </a:prstGeom>
+          <a:solidFill>
+            <a:srgbClr val="F8E7DD"/>
+          </a:solidFill>
+          <a:ln w="12700">
+            <a:solidFill>
+              <a:srgbClr val="DB6C30"/>
+            </a:solidFill>
+            <a:prstDash val="solid"/>
+          </a:ln>
+        </p:spPr>
+      </p:sp>
+      <p:sp>
+        <p:nvSpPr>
+          <p:cNvPr id="17" name="Text 15"/>
+          <p:cNvSpPr/>
+          <p:nvPr/>
+        </p:nvSpPr>
+        <p:spPr>
+          <a:xfrm>
+            <a:off x="4617720" y="1874520"/>
+            <a:ext cx="2048256" cy="731520"/>
+          </a:xfrm>
+          <a:prstGeom prst="rect">
+            <a:avLst/>
+          </a:prstGeom>
+          <a:noFill/>
+          <a:ln/>
+        </p:spPr>
+        <p:txBody>
+          <a:bodyPr wrap="square" lIns="0" tIns="0" rIns="0" bIns="0" rtlCol="0" anchor="ctr">
+            <a:normAutofit/>
+          </a:bodyPr>
+          <a:lstStyle/>
+          <a:p>
+            <a:pPr algn="ctr" indent="0" marL="0">
+              <a:buNone/>
+            </a:pPr>
+            <a:r>
+              <a:rPr lang="en-US" sz="1600" b="1" dirty="0">
+                <a:solidFill>
+                  <a:srgbClr val="333639"/>
+                </a:solidFill>
+                <a:latin typeface="FlandersArtSans-Bold" pitchFamily="34" charset="0"/>
+                <a:ea typeface="FlandersArtSans-Bold" pitchFamily="34" charset="-122"/>
+                <a:cs typeface="FlandersArtSans-Bold" pitchFamily="34" charset="-120"/>
+              </a:rPr>
+              <a:t>Optimizer state</a:t>
+            </a:r>
+            <a:endParaRPr lang="en-US" sz="1600" dirty="0"/>
+          </a:p>
+          <a:p>
+            <a:pPr algn="ctr" indent="0" marL="0">
+              <a:buNone/>
+            </a:pPr>
+            <a:r>
+              <a:rPr lang="en-US" sz="1600" b="1" dirty="0">
+                <a:solidFill>
+                  <a:srgbClr val="333639"/>
+                </a:solidFill>
+                <a:latin typeface="FlandersArtSans-Bold" pitchFamily="34" charset="0"/>
+                <a:ea typeface="FlandersArtSans-Bold" pitchFamily="34" charset="-122"/>
+                <a:cs typeface="FlandersArtSans-Bold" pitchFamily="34" charset="-120"/>
+              </a:rPr>
+              <a:t>+ optimizer step</a:t>
+            </a:r>
+            <a:endParaRPr lang="en-US" sz="1600" dirty="0"/>
+          </a:p>
+        </p:txBody>
+      </p:sp>
+      <p:sp>
+        <p:nvSpPr>
+          <p:cNvPr id="18" name="Shape 16"/>
+          <p:cNvSpPr/>
+          <p:nvPr/>
+        </p:nvSpPr>
+        <p:spPr>
+          <a:xfrm>
+            <a:off x="4507992" y="3346704"/>
+            <a:ext cx="2267712" cy="822960"/>
+          </a:xfrm>
+          <a:prstGeom prst="rect">
+            <a:avLst/>
+          </a:prstGeom>
+          <a:solidFill>
+            <a:srgbClr val="FFFFFF"/>
+          </a:solidFill>
+          <a:ln w="12700">
+            <a:solidFill>
+              <a:srgbClr val="C7CBD2"/>
+            </a:solidFill>
+            <a:prstDash val="solid"/>
+          </a:ln>
+        </p:spPr>
+      </p:sp>
+      <p:sp>
+        <p:nvSpPr>
+          <p:cNvPr id="19" name="Text 17"/>
+          <p:cNvSpPr/>
+          <p:nvPr/>
+        </p:nvSpPr>
+        <p:spPr>
+          <a:xfrm>
+            <a:off x="4617720" y="3392424"/>
+            <a:ext cx="2048256" cy="731520"/>
+          </a:xfrm>
+          <a:prstGeom prst="rect">
+            <a:avLst/>
+          </a:prstGeom>
+          <a:noFill/>
+          <a:ln/>
+        </p:spPr>
+        <p:txBody>
+          <a:bodyPr wrap="square" lIns="0" tIns="0" rIns="0" bIns="0" rtlCol="0" anchor="ctr">
+            <a:normAutofit/>
+          </a:bodyPr>
+          <a:lstStyle/>
+          <a:p>
+            <a:pPr algn="ctr" indent="0" marL="0">
+              <a:buNone/>
+            </a:pPr>
+            <a:r>
+              <a:rPr lang="en-US" sz="1600" b="1" dirty="0">
+                <a:solidFill>
+                  <a:srgbClr val="333639"/>
+                </a:solidFill>
+                <a:latin typeface="FlandersArtSans-Bold" pitchFamily="34" charset="0"/>
+                <a:ea typeface="FlandersArtSans-Bold" pitchFamily="34" charset="-122"/>
+                <a:cs typeface="FlandersArtSans-Bold" pitchFamily="34" charset="-120"/>
+              </a:rPr>
+              <a:t>Parameters + gradients</a:t>
+            </a:r>
+            <a:endParaRPr lang="en-US" sz="1600" dirty="0"/>
+          </a:p>
+          <a:p>
+            <a:pPr algn="ctr" indent="0" marL="0">
+              <a:buNone/>
+            </a:pPr>
+            <a:r>
+              <a:rPr lang="en-US" sz="1600" b="1" dirty="0">
+                <a:solidFill>
+                  <a:srgbClr val="333639"/>
+                </a:solidFill>
+                <a:latin typeface="FlandersArtSans-Bold" pitchFamily="34" charset="0"/>
+                <a:ea typeface="FlandersArtSans-Bold" pitchFamily="34" charset="-122"/>
+                <a:cs typeface="FlandersArtSans-Bold" pitchFamily="34" charset="-120"/>
+              </a:rPr>
+              <a:t>(optional)</a:t>
+            </a:r>
+            <a:endParaRPr lang="en-US" sz="1600" dirty="0"/>
+          </a:p>
+        </p:txBody>
+      </p:sp>
+      <p:sp>
+        <p:nvSpPr>
+          <p:cNvPr id="20" name="Shape 18"/>
+          <p:cNvSpPr/>
+          <p:nvPr/>
+        </p:nvSpPr>
+        <p:spPr>
+          <a:xfrm>
+            <a:off x="8677656" y="2212848"/>
+            <a:ext cx="2212848" cy="1097280"/>
+          </a:xfrm>
+          <a:prstGeom prst="rect">
+            <a:avLst/>
+          </a:prstGeom>
+          <a:solidFill>
+            <a:srgbClr val="F8E7DD"/>
+          </a:solidFill>
+          <a:ln w="12700">
+            <a:solidFill>
+              <a:srgbClr val="DB6C30"/>
+            </a:solidFill>
+            <a:prstDash val="solid"/>
+          </a:ln>
+        </p:spPr>
+      </p:sp>
+      <p:sp>
+        <p:nvSpPr>
+          <p:cNvPr id="21" name="Text 19"/>
+          <p:cNvSpPr/>
+          <p:nvPr/>
+        </p:nvSpPr>
+        <p:spPr>
+          <a:xfrm>
+            <a:off x="8787384" y="2258568"/>
+            <a:ext cx="1993392" cy="1005840"/>
+          </a:xfrm>
+          <a:prstGeom prst="rect">
+            <a:avLst/>
+          </a:prstGeom>
+          <a:noFill/>
+          <a:ln/>
+        </p:spPr>
+        <p:txBody>
+          <a:bodyPr wrap="square" lIns="0" tIns="0" rIns="0" bIns="0" rtlCol="0" anchor="ctr">
+            <a:normAutofit/>
+          </a:bodyPr>
+          <a:lstStyle/>
+          <a:p>
+            <a:pPr algn="ctr" indent="0" marL="0">
+              <a:buNone/>
+            </a:pPr>
+            <a:r>
+              <a:rPr lang="en-US" sz="1600" b="1" dirty="0">
+                <a:solidFill>
+                  <a:srgbClr val="333639"/>
+                </a:solidFill>
+                <a:latin typeface="FlandersArtSans-Bold" pitchFamily="34" charset="0"/>
+                <a:ea typeface="FlandersArtSans-Bold" pitchFamily="34" charset="-122"/>
+                <a:cs typeface="FlandersArtSans-Bold" pitchFamily="34" charset="-120"/>
+              </a:rPr>
+              <a:t>Forward + backward</a:t>
+            </a:r>
+            <a:endParaRPr lang="en-US" sz="1600" dirty="0"/>
+          </a:p>
+          <a:p>
+            <a:pPr algn="ctr" indent="0" marL="0">
+              <a:buNone/>
+            </a:pPr>
+            <a:r>
+              <a:rPr lang="en-US" sz="1600" b="1" dirty="0">
+                <a:solidFill>
+                  <a:srgbClr val="333639"/>
+                </a:solidFill>
+                <a:latin typeface="FlandersArtSans-Bold" pitchFamily="34" charset="0"/>
+                <a:ea typeface="FlandersArtSans-Bold" pitchFamily="34" charset="-122"/>
+                <a:cs typeface="FlandersArtSans-Bold" pitchFamily="34" charset="-120"/>
+              </a:rPr>
+              <a:t>GPU compute</a:t>
+            </a:r>
+            <a:endParaRPr lang="en-US" sz="1600" dirty="0"/>
+          </a:p>
+        </p:txBody>
+      </p:sp>
+      <p:sp>
+        <p:nvSpPr>
+          <p:cNvPr id="22" name="Shape 20"/>
+          <p:cNvSpPr/>
+          <p:nvPr/>
+        </p:nvSpPr>
+        <p:spPr>
+          <a:xfrm>
+            <a:off x="7132320" y="2240280"/>
+            <a:ext cx="1207008" cy="0"/>
+          </a:xfrm>
+          <a:prstGeom prst="line">
+            <a:avLst/>
+          </a:prstGeom>
+          <a:noFill/>
+          <a:ln w="19050">
+            <a:solidFill>
+              <a:srgbClr val="DB6C30"/>
+            </a:solidFill>
+            <a:prstDash val="solid"/>
+            <a:headEnd type="triangle"/>
+          </a:ln>
+        </p:spPr>
+      </p:sp>
+      <p:sp>
+        <p:nvSpPr>
+          <p:cNvPr id="23" name="Text 21"/>
+          <p:cNvSpPr/>
+          <p:nvPr/>
+        </p:nvSpPr>
+        <p:spPr>
+          <a:xfrm>
+            <a:off x="7114032" y="1874520"/>
+            <a:ext cx="1225296" cy="256032"/>
+          </a:xfrm>
+          <a:prstGeom prst="rect">
+            <a:avLst/>
+          </a:prstGeom>
+          <a:noFill/>
+          <a:ln/>
+        </p:spPr>
+        <p:txBody>
+          <a:bodyPr wrap="square" lIns="0" tIns="0" rIns="0" bIns="0" rtlCol="0" anchor="ctr">
+            <a:normAutofit/>
+          </a:bodyPr>
+          <a:lstStyle/>
+          <a:p>
+            <a:pPr algn="ctr" indent="0" marL="0">
+              <a:buNone/>
+            </a:pPr>
+            <a:r>
+              <a:rPr lang="en-US" sz="1600" b="1" dirty="0">
+                <a:solidFill>
+                  <a:srgbClr val="DB6C30"/>
+                </a:solidFill>
+                <a:latin typeface="FlandersArtSans-Bold" pitchFamily="34" charset="0"/>
+                <a:ea typeface="FlandersArtSans-Bold" pitchFamily="34" charset="-122"/>
+                <a:cs typeface="FlandersArtSans-Bold" pitchFamily="34" charset="-120"/>
+              </a:rPr>
+              <a:t>gradients</a:t>
+            </a:r>
+            <a:endParaRPr lang="en-US" sz="1600" dirty="0"/>
+          </a:p>
+        </p:txBody>
+      </p:sp>
+      <p:sp>
+        <p:nvSpPr>
+          <p:cNvPr id="24" name="Shape 22"/>
+          <p:cNvSpPr/>
+          <p:nvPr/>
+        </p:nvSpPr>
+        <p:spPr>
+          <a:xfrm>
+            <a:off x="7132320" y="2862072"/>
+            <a:ext cx="1207008" cy="0"/>
+          </a:xfrm>
+          <a:prstGeom prst="line">
+            <a:avLst/>
+          </a:prstGeom>
+          <a:noFill/>
+          <a:ln w="19050">
+            <a:solidFill>
+              <a:srgbClr val="DB6C30"/>
+            </a:solidFill>
+            <a:prstDash val="solid"/>
+            <a:tailEnd type="triangle"/>
+          </a:ln>
+        </p:spPr>
+      </p:sp>
+      <p:sp>
+        <p:nvSpPr>
+          <p:cNvPr id="25" name="Text 23"/>
+          <p:cNvSpPr/>
+          <p:nvPr/>
+        </p:nvSpPr>
+        <p:spPr>
+          <a:xfrm>
+            <a:off x="7104888" y="2944368"/>
+            <a:ext cx="1280160" cy="310896"/>
+          </a:xfrm>
+          <a:prstGeom prst="rect">
+            <a:avLst/>
+          </a:prstGeom>
+          <a:noFill/>
+          <a:ln/>
+        </p:spPr>
+        <p:txBody>
+          <a:bodyPr wrap="square" lIns="0" tIns="0" rIns="0" bIns="0" rtlCol="0" anchor="ctr">
+            <a:normAutofit/>
+          </a:bodyPr>
+          <a:lstStyle/>
+          <a:p>
+            <a:pPr algn="ctr" indent="0" marL="0">
+              <a:buNone/>
+            </a:pPr>
+            <a:r>
+              <a:rPr lang="en-US" sz="1600" b="1" dirty="0">
+                <a:solidFill>
+                  <a:srgbClr val="DB6C30"/>
+                </a:solidFill>
+                <a:latin typeface="FlandersArtSans-Bold" pitchFamily="34" charset="0"/>
+                <a:ea typeface="FlandersArtSans-Bold" pitchFamily="34" charset="-122"/>
+                <a:cs typeface="FlandersArtSans-Bold" pitchFamily="34" charset="-120"/>
+              </a:rPr>
+              <a:t>updated params</a:t>
+            </a:r>
+            <a:endParaRPr lang="en-US" sz="1600" dirty="0"/>
+          </a:p>
+        </p:txBody>
+      </p:sp>
+      <p:sp>
+        <p:nvSpPr>
+          <p:cNvPr id="26" name="Shape 24"/>
+          <p:cNvSpPr/>
+          <p:nvPr/>
+        </p:nvSpPr>
+        <p:spPr>
+          <a:xfrm>
+            <a:off x="7132320" y="3694176"/>
+            <a:ext cx="1207008" cy="0"/>
+          </a:xfrm>
+          <a:prstGeom prst="line">
+            <a:avLst/>
+          </a:prstGeom>
+          <a:noFill/>
+          <a:ln w="16510">
+            <a:solidFill>
+              <a:srgbClr val="656A70"/>
+            </a:solidFill>
+            <a:prstDash val="solid"/>
+            <a:tailEnd type="triangle"/>
+          </a:ln>
+        </p:spPr>
+      </p:sp>
+      <p:sp>
+        <p:nvSpPr>
+          <p:cNvPr id="27" name="Text 25"/>
+          <p:cNvSpPr/>
+          <p:nvPr/>
+        </p:nvSpPr>
+        <p:spPr>
+          <a:xfrm>
+            <a:off x="7168896" y="3355848"/>
+            <a:ext cx="1133856" cy="256032"/>
+          </a:xfrm>
+          <a:prstGeom prst="rect">
+            <a:avLst/>
+          </a:prstGeom>
+          <a:noFill/>
+          <a:ln/>
+        </p:spPr>
+        <p:txBody>
+          <a:bodyPr wrap="square" lIns="0" tIns="0" rIns="0" bIns="0" rtlCol="0" anchor="ctr">
+            <a:normAutofit/>
+          </a:bodyPr>
+          <a:lstStyle/>
+          <a:p>
+            <a:pPr algn="ctr" indent="0" marL="0">
+              <a:buNone/>
+            </a:pPr>
+            <a:r>
+              <a:rPr lang="en-US" sz="1600" dirty="0">
+                <a:solidFill>
+                  <a:srgbClr val="656A70"/>
+                </a:solidFill>
+                <a:latin typeface="FlandersArtSans-Regular" pitchFamily="34" charset="0"/>
+                <a:ea typeface="FlandersArtSans-Regular" pitchFamily="34" charset="-122"/>
+                <a:cs typeface="FlandersArtSans-Regular" pitchFamily="34" charset="-120"/>
+              </a:rPr>
+              <a:t>prefetch</a:t>
+            </a:r>
+            <a:endParaRPr lang="en-US" sz="1600" dirty="0"/>
+          </a:p>
+        </p:txBody>
+      </p:sp>
+      <p:sp>
+        <p:nvSpPr>
+          <p:cNvPr id="28" name="Shape 26"/>
+          <p:cNvSpPr/>
+          <p:nvPr/>
+        </p:nvSpPr>
+        <p:spPr>
+          <a:xfrm>
+            <a:off x="7132320" y="4251960"/>
+            <a:ext cx="1207008" cy="0"/>
+          </a:xfrm>
+          <a:prstGeom prst="line">
+            <a:avLst/>
+          </a:prstGeom>
+          <a:noFill/>
+          <a:ln w="16510">
+            <a:solidFill>
+              <a:srgbClr val="656A70"/>
+            </a:solidFill>
+            <a:prstDash val="solid"/>
+            <a:headEnd type="triangle"/>
+          </a:ln>
+        </p:spPr>
+      </p:sp>
+      <p:sp>
+        <p:nvSpPr>
+          <p:cNvPr id="29" name="Text 27"/>
+          <p:cNvSpPr/>
+          <p:nvPr/>
+        </p:nvSpPr>
+        <p:spPr>
+          <a:xfrm>
+            <a:off x="7168896" y="4334256"/>
+            <a:ext cx="1133856" cy="256032"/>
+          </a:xfrm>
+          <a:prstGeom prst="rect">
+            <a:avLst/>
+          </a:prstGeom>
+          <a:noFill/>
+          <a:ln/>
+        </p:spPr>
+        <p:txBody>
+          <a:bodyPr wrap="square" lIns="0" tIns="0" rIns="0" bIns="0" rtlCol="0" anchor="ctr">
+            <a:normAutofit/>
+          </a:bodyPr>
+          <a:lstStyle/>
+          <a:p>
+            <a:pPr algn="ctr" indent="0" marL="0">
+              <a:buNone/>
+            </a:pPr>
+            <a:r>
+              <a:rPr lang="en-US" sz="1600" dirty="0">
+                <a:solidFill>
+                  <a:srgbClr val="656A70"/>
+                </a:solidFill>
+                <a:latin typeface="FlandersArtSans-Regular" pitchFamily="34" charset="0"/>
+                <a:ea typeface="FlandersArtSans-Regular" pitchFamily="34" charset="-122"/>
+                <a:cs typeface="FlandersArtSans-Regular" pitchFamily="34" charset="-120"/>
+              </a:rPr>
+              <a:t>offload</a:t>
+            </a:r>
+            <a:endParaRPr lang="en-US" sz="1600" dirty="0"/>
+          </a:p>
+        </p:txBody>
+      </p:sp>
+      <p:sp>
+        <p:nvSpPr>
+          <p:cNvPr id="30" name="Text 28"/>
+          <p:cNvSpPr/>
+          <p:nvPr/>
+        </p:nvSpPr>
+        <p:spPr>
+          <a:xfrm>
+            <a:off x="4187952" y="5413248"/>
+            <a:ext cx="7022592" cy="475488"/>
+          </a:xfrm>
+          <a:prstGeom prst="rect">
+            <a:avLst/>
+          </a:prstGeom>
+          <a:noFill/>
+          <a:ln/>
+        </p:spPr>
+        <p:txBody>
+          <a:bodyPr wrap="square" lIns="0" tIns="0" rIns="0" bIns="0" rtlCol="0" anchor="ctr">
+            <a:normAutofit/>
+          </a:bodyPr>
+          <a:lstStyle/>
+          <a:p>
+            <a:pPr algn="ctr" indent="0" marL="0">
+              <a:buNone/>
+            </a:pPr>
+            <a:r>
+              <a:rPr lang="en-US" sz="1600" b="1" dirty="0">
+                <a:solidFill>
+                  <a:srgbClr val="DB6C30"/>
+                </a:solidFill>
+                <a:latin typeface="FlandersArtSans-Bold" pitchFamily="34" charset="0"/>
+                <a:ea typeface="FlandersArtSans-Bold" pitchFamily="34" charset="-122"/>
+                <a:cs typeface="FlandersArtSans-Bold" pitchFamily="34" charset="-120"/>
+              </a:rPr>
+              <a:t>Offload the largest cold state first; streaming parameters from host for every layer is the more expensive fallback.</a:t>
+            </a:r>
+            <a:endParaRPr lang="en-US" sz="1600" dirty="0"/>
+          </a:p>
+        </p:txBody>
+      </p:sp>
+      <p:sp>
+        <p:nvSpPr>
+          <p:cNvPr id="100" name="Slide Number Placeholder 100">
+            <a:extLst>
+              <a:ext uri="{FF2B5EF4-FFF2-40B4-BE49-F238E27FC236}">
+                <a16:creationId xmlns:a16="http://schemas.microsoft.com/office/drawing/2014/main" id="{055F00DA-BA1F-1800-8271-6B0ABAA2D996}"/>
+              </a:ext>
+            </a:extLst>
+          </p:cNvPr>
+          <p:cNvSpPr>
+            <a:spLocks noGrp="1"/>
+          </p:cNvSpPr>
+          <p:nvPr>
+            <p:ph type="sldNum" idx="12"/>
+          </p:nvPr>
+        </p:nvSpPr>
+        <p:spPr/>
+        <p:txBody>
+          <a:bodyPr/>
+          <a:lstStyle/>
+          <a:p>
+            <a:fld id="{00000000-0000-0000-0000-000000000100}" type="slidenum">
+              <a:t>13</a:t>
+            </a:fld>
+            <a:endParaRPr/>
+          </a:p>
+        </p:txBody>
+      </p:sp>
+    </p:spTree>
+  </p:cSld>
+  <p:clrMapOvr>
+    <a:masterClrMapping/>
+  </p:clrMapOvr>
+</p:sld>
+</file>
+
+<file path=ppt/slides/slide21.xml><?xml version="1.0" encoding="utf-8"?>
+<p:sld xmlns:a="http://schemas.openxmlformats.org/drawingml/2006/main" xmlns:r="http://schemas.openxmlformats.org/officeDocument/2006/relationships" xmlns:p="http://schemas.openxmlformats.org/presentationml/2006/main">
+  <p:cSld name="Slide 2">
+    <p:spTree>
+      <p:nvGrpSpPr>
+        <p:cNvPr id="1" name=""/>
+        <p:cNvGrpSpPr/>
+        <p:nvPr/>
+      </p:nvGrpSpPr>
+      <p:grpSpPr>
+        <a:xfrm>
+          <a:off x="0" y="0"/>
+          <a:ext cx="0" cy="0"/>
+          <a:chOff x="0" y="0"/>
+          <a:chExt cx="0" cy="0"/>
+        </a:xfrm>
+      </p:grpSpPr>
+      <p:sp>
+        <p:nvSpPr>
+          <p:cNvPr id="2" name="Text 0"/>
+          <p:cNvSpPr/>
+          <p:nvPr/>
+        </p:nvSpPr>
+        <p:spPr>
+          <a:xfrm>
+            <a:off x="658368" y="310896"/>
+            <a:ext cx="10835640" cy="566928"/>
+          </a:xfrm>
+          <a:prstGeom prst="rect">
+            <a:avLst/>
+          </a:prstGeom>
+          <a:noFill/>
+          <a:ln/>
+        </p:spPr>
+        <p:txBody>
+          <a:bodyPr wrap="square" lIns="0" tIns="0" rIns="0" bIns="0" rtlCol="0" anchor="ctr">
+            <a:normAutofit/>
+          </a:bodyPr>
+          <a:lstStyle/>
+          <a:p>
+            <a:pPr algn="l" indent="0" marL="0">
+              <a:buNone/>
+            </a:pPr>
+            <a:r>
+              <a:rPr lang="en-US" sz="2800" dirty="0">
+                <a:solidFill>
+                  <a:srgbClr val="333639"/>
+                </a:solidFill>
+                <a:latin typeface="FlandersArtSans-Regular" pitchFamily="34" charset="0"/>
+                <a:ea typeface="FlandersArtSans-Regular" pitchFamily="34" charset="-122"/>
+                <a:cs typeface="FlandersArtSans-Regular" pitchFamily="34" charset="-120"/>
+              </a:rPr>
+              <a:t>Inference offload has two different execution patterns</a:t>
+            </a:r>
+            <a:endParaRPr lang="en-US" sz="2800" dirty="0"/>
+          </a:p>
+        </p:txBody>
+      </p:sp>
+      <p:sp>
+        <p:nvSpPr>
+          <p:cNvPr id="3" name="Text 1"/>
+          <p:cNvSpPr/>
+          <p:nvPr/>
+        </p:nvSpPr>
+        <p:spPr>
+          <a:xfrm>
+            <a:off x="658368" y="1143000"/>
+            <a:ext cx="5257800" cy="310896"/>
+          </a:xfrm>
+          <a:prstGeom prst="rect">
+            <a:avLst/>
+          </a:prstGeom>
+          <a:noFill/>
+          <a:ln/>
+        </p:spPr>
+        <p:txBody>
+          <a:bodyPr wrap="square" lIns="0" tIns="0" rIns="0" bIns="0" rtlCol="0" anchor="ctr">
+            <a:normAutofit/>
+          </a:bodyPr>
+          <a:lstStyle/>
+          <a:p>
+            <a:pPr algn="l" indent="0" marL="0">
+              <a:buNone/>
+            </a:pPr>
+            <a:r>
+              <a:rPr lang="en-US" sz="1600" b="1" dirty="0">
+                <a:solidFill>
+                  <a:srgbClr val="DB6C30"/>
+                </a:solidFill>
+                <a:latin typeface="FlandersArtSans-Bold" pitchFamily="34" charset="0"/>
+                <a:ea typeface="FlandersArtSans-Bold" pitchFamily="34" charset="-122"/>
+                <a:cs typeface="FlandersArtSans-Bold" pitchFamily="34" charset="-120"/>
+              </a:rPr>
+              <a:t>A  KEEP SOME LAYERS ON THE CPU</a:t>
+            </a:r>
+            <a:endParaRPr lang="en-US" sz="1600" dirty="0"/>
+          </a:p>
+        </p:txBody>
+      </p:sp>
+      <p:sp>
+        <p:nvSpPr>
+          <p:cNvPr id="4" name="Text 2"/>
+          <p:cNvSpPr/>
+          <p:nvPr/>
+        </p:nvSpPr>
+        <p:spPr>
+          <a:xfrm>
+            <a:off x="658368" y="1481328"/>
+            <a:ext cx="5257800" cy="347472"/>
+          </a:xfrm>
+          <a:prstGeom prst="rect">
+            <a:avLst/>
+          </a:prstGeom>
+          <a:noFill/>
+          <a:ln/>
+        </p:spPr>
+        <p:txBody>
+          <a:bodyPr wrap="square" lIns="0" tIns="0" rIns="0" bIns="0" rtlCol="0" anchor="ctr">
+            <a:normAutofit/>
+          </a:bodyPr>
+          <a:lstStyle/>
+          <a:p>
+            <a:pPr algn="l" indent="0" marL="0">
+              <a:buNone/>
+            </a:pPr>
+            <a:r>
+              <a:rPr lang="en-US" sz="1900" b="1" dirty="0">
+                <a:solidFill>
+                  <a:srgbClr val="333639"/>
+                </a:solidFill>
+                <a:latin typeface="FlandersArtSans-Bold" pitchFamily="34" charset="0"/>
+                <a:ea typeface="FlandersArtSans-Bold" pitchFamily="34" charset="-122"/>
+                <a:cs typeface="FlandersArtSans-Bold" pitchFamily="34" charset="-120"/>
+              </a:rPr>
+              <a:t>CPU computes its assigned layers</a:t>
+            </a:r>
+            <a:endParaRPr lang="en-US" sz="1900" dirty="0"/>
+          </a:p>
+        </p:txBody>
+      </p:sp>
+      <p:sp>
+        <p:nvSpPr>
+          <p:cNvPr id="5" name="Text 3"/>
+          <p:cNvSpPr/>
+          <p:nvPr/>
+        </p:nvSpPr>
+        <p:spPr>
+          <a:xfrm>
+            <a:off x="658368" y="1847088"/>
+            <a:ext cx="5257800" cy="640080"/>
+          </a:xfrm>
+          <a:prstGeom prst="rect">
+            <a:avLst/>
+          </a:prstGeom>
+          <a:noFill/>
+          <a:ln/>
+        </p:spPr>
+        <p:txBody>
+          <a:bodyPr wrap="square" lIns="0" tIns="0" rIns="0" bIns="0" rtlCol="0" anchor="t">
+            <a:normAutofit/>
+          </a:bodyPr>
+          <a:lstStyle/>
+          <a:p>
+            <a:pPr algn="l" indent="0" marL="0">
+              <a:buNone/>
+            </a:pPr>
+            <a:r>
+              <a:rPr lang="en-US" sz="1600" dirty="0">
+                <a:solidFill>
+                  <a:srgbClr val="656A70"/>
+                </a:solidFill>
+                <a:latin typeface="FlandersArtSans-Regular" pitchFamily="34" charset="0"/>
+                <a:ea typeface="FlandersArtSans-Regular" pitchFamily="34" charset="-122"/>
+                <a:cs typeface="FlandersArtSans-Regular" pitchFamily="34" charset="-120"/>
+              </a:rPr>
+              <a:t>Only activations cross the boundary, but CPU layer compute is usually much slower.</a:t>
+            </a:r>
+            <a:endParaRPr lang="en-US" sz="1600" dirty="0"/>
+          </a:p>
+        </p:txBody>
+      </p:sp>
+      <p:sp>
+        <p:nvSpPr>
+          <p:cNvPr id="6" name="Shape 4"/>
+          <p:cNvSpPr/>
+          <p:nvPr/>
+        </p:nvSpPr>
+        <p:spPr>
+          <a:xfrm>
+            <a:off x="841248" y="2816352"/>
+            <a:ext cx="1737360" cy="987552"/>
+          </a:xfrm>
+          <a:prstGeom prst="rect">
+            <a:avLst/>
+          </a:prstGeom>
+          <a:solidFill>
+            <a:srgbClr val="F8E7DD"/>
+          </a:solidFill>
+          <a:ln w="12700">
+            <a:solidFill>
+              <a:srgbClr val="DB6C30"/>
+            </a:solidFill>
+            <a:prstDash val="solid"/>
+          </a:ln>
+        </p:spPr>
+      </p:sp>
+      <p:sp>
+        <p:nvSpPr>
+          <p:cNvPr id="7" name="Text 5"/>
+          <p:cNvSpPr/>
+          <p:nvPr/>
+        </p:nvSpPr>
+        <p:spPr>
+          <a:xfrm>
+            <a:off x="950976" y="2862072"/>
+            <a:ext cx="1517904" cy="896112"/>
+          </a:xfrm>
+          <a:prstGeom prst="rect">
+            <a:avLst/>
+          </a:prstGeom>
+          <a:noFill/>
+          <a:ln/>
+        </p:spPr>
+        <p:txBody>
+          <a:bodyPr wrap="square" lIns="0" tIns="0" rIns="0" bIns="0" rtlCol="0" anchor="ctr">
+            <a:normAutofit/>
+          </a:bodyPr>
+          <a:lstStyle/>
+          <a:p>
+            <a:pPr algn="ctr" indent="0" marL="0">
+              <a:buNone/>
+            </a:pPr>
+            <a:r>
+              <a:rPr lang="en-US" sz="1600" b="1" dirty="0">
+                <a:solidFill>
+                  <a:srgbClr val="333639"/>
+                </a:solidFill>
+                <a:latin typeface="FlandersArtSans-Bold" pitchFamily="34" charset="0"/>
+                <a:ea typeface="FlandersArtSans-Bold" pitchFamily="34" charset="-122"/>
+                <a:cs typeface="FlandersArtSans-Bold" pitchFamily="34" charset="-120"/>
+              </a:rPr>
+              <a:t>GPU layers</a:t>
+            </a:r>
+            <a:endParaRPr lang="en-US" sz="1600" dirty="0"/>
+          </a:p>
+          <a:p>
+            <a:pPr algn="ctr" indent="0" marL="0">
+              <a:buNone/>
+            </a:pPr>
+            <a:r>
+              <a:rPr lang="en-US" sz="1600" b="1" dirty="0">
+                <a:solidFill>
+                  <a:srgbClr val="333639"/>
+                </a:solidFill>
+                <a:latin typeface="FlandersArtSans-Bold" pitchFamily="34" charset="0"/>
+                <a:ea typeface="FlandersArtSans-Bold" pitchFamily="34" charset="-122"/>
+                <a:cs typeface="FlandersArtSans-Bold" pitchFamily="34" charset="-120"/>
+              </a:rPr>
+              <a:t>GPU compute</a:t>
+            </a:r>
+            <a:endParaRPr lang="en-US" sz="1600" dirty="0"/>
+          </a:p>
+        </p:txBody>
+      </p:sp>
+      <p:sp>
+        <p:nvSpPr>
+          <p:cNvPr id="8" name="Shape 6"/>
+          <p:cNvSpPr/>
+          <p:nvPr/>
+        </p:nvSpPr>
+        <p:spPr>
+          <a:xfrm>
+            <a:off x="3895344" y="2816352"/>
+            <a:ext cx="1737360" cy="987552"/>
+          </a:xfrm>
+          <a:prstGeom prst="rect">
+            <a:avLst/>
+          </a:prstGeom>
+          <a:solidFill>
+            <a:srgbClr val="ECEEF1"/>
+          </a:solidFill>
+          <a:ln w="12700">
+            <a:solidFill>
+              <a:srgbClr val="C7CBD2"/>
+            </a:solidFill>
+            <a:prstDash val="solid"/>
+          </a:ln>
+        </p:spPr>
+      </p:sp>
+      <p:sp>
+        <p:nvSpPr>
+          <p:cNvPr id="9" name="Text 7"/>
+          <p:cNvSpPr/>
+          <p:nvPr/>
+        </p:nvSpPr>
+        <p:spPr>
+          <a:xfrm>
+            <a:off x="4005072" y="2862072"/>
+            <a:ext cx="1517904" cy="896112"/>
+          </a:xfrm>
+          <a:prstGeom prst="rect">
+            <a:avLst/>
+          </a:prstGeom>
+          <a:noFill/>
+          <a:ln/>
+        </p:spPr>
+        <p:txBody>
+          <a:bodyPr wrap="square" lIns="0" tIns="0" rIns="0" bIns="0" rtlCol="0" anchor="ctr">
+            <a:normAutofit/>
+          </a:bodyPr>
+          <a:lstStyle/>
+          <a:p>
+            <a:pPr algn="ctr" indent="0" marL="0">
+              <a:buNone/>
+            </a:pPr>
+            <a:r>
+              <a:rPr lang="en-US" sz="1600" b="1" dirty="0">
+                <a:solidFill>
+                  <a:srgbClr val="333639"/>
+                </a:solidFill>
+                <a:latin typeface="FlandersArtSans-Bold" pitchFamily="34" charset="0"/>
+                <a:ea typeface="FlandersArtSans-Bold" pitchFamily="34" charset="-122"/>
+                <a:cs typeface="FlandersArtSans-Bold" pitchFamily="34" charset="-120"/>
+              </a:rPr>
+              <a:t>CPU layers</a:t>
+            </a:r>
+            <a:endParaRPr lang="en-US" sz="1600" dirty="0"/>
+          </a:p>
+          <a:p>
+            <a:pPr algn="ctr" indent="0" marL="0">
+              <a:buNone/>
+            </a:pPr>
+            <a:r>
+              <a:rPr lang="en-US" sz="1600" b="1" dirty="0">
+                <a:solidFill>
+                  <a:srgbClr val="333639"/>
+                </a:solidFill>
+                <a:latin typeface="FlandersArtSans-Bold" pitchFamily="34" charset="0"/>
+                <a:ea typeface="FlandersArtSans-Bold" pitchFamily="34" charset="-122"/>
+                <a:cs typeface="FlandersArtSans-Bold" pitchFamily="34" charset="-120"/>
+              </a:rPr>
+              <a:t>CPU compute</a:t>
+            </a:r>
+            <a:endParaRPr lang="en-US" sz="1600" dirty="0"/>
+          </a:p>
+        </p:txBody>
+      </p:sp>
+      <p:sp>
+        <p:nvSpPr>
+          <p:cNvPr id="10" name="Shape 8"/>
+          <p:cNvSpPr/>
+          <p:nvPr/>
+        </p:nvSpPr>
+        <p:spPr>
+          <a:xfrm>
+            <a:off x="2615184" y="3310128"/>
+            <a:ext cx="1225296" cy="0"/>
+          </a:xfrm>
+          <a:prstGeom prst="line">
+            <a:avLst/>
+          </a:prstGeom>
+          <a:noFill/>
+          <a:ln w="19050">
+            <a:solidFill>
+              <a:srgbClr val="DB6C30"/>
+            </a:solidFill>
+            <a:prstDash val="solid"/>
+            <a:tailEnd type="triangle"/>
+          </a:ln>
+        </p:spPr>
+      </p:sp>
+      <p:sp>
+        <p:nvSpPr>
+          <p:cNvPr id="11" name="Text 9"/>
+          <p:cNvSpPr/>
+          <p:nvPr/>
+        </p:nvSpPr>
+        <p:spPr>
+          <a:xfrm>
+            <a:off x="2651760" y="2944368"/>
+            <a:ext cx="1143000" cy="256032"/>
+          </a:xfrm>
+          <a:prstGeom prst="rect">
+            <a:avLst/>
+          </a:prstGeom>
+          <a:noFill/>
+          <a:ln/>
+        </p:spPr>
+        <p:txBody>
+          <a:bodyPr wrap="square" lIns="0" tIns="0" rIns="0" bIns="0" rtlCol="0" anchor="ctr">
+            <a:normAutofit/>
+          </a:bodyPr>
+          <a:lstStyle/>
+          <a:p>
+            <a:pPr algn="ctr" indent="0" marL="0">
+              <a:buNone/>
+            </a:pPr>
+            <a:r>
+              <a:rPr lang="en-US" sz="1600" b="1" dirty="0">
+                <a:solidFill>
+                  <a:srgbClr val="DB6C30"/>
+                </a:solidFill>
+                <a:latin typeface="FlandersArtSans-Bold" pitchFamily="34" charset="0"/>
+                <a:ea typeface="FlandersArtSans-Bold" pitchFamily="34" charset="-122"/>
+                <a:cs typeface="FlandersArtSans-Bold" pitchFamily="34" charset="-120"/>
+              </a:rPr>
+              <a:t>activations</a:t>
+            </a:r>
+            <a:endParaRPr lang="en-US" sz="1600" dirty="0"/>
+          </a:p>
+        </p:txBody>
+      </p:sp>
+      <p:sp>
+        <p:nvSpPr>
+          <p:cNvPr id="12" name="Text 10"/>
+          <p:cNvSpPr/>
+          <p:nvPr/>
+        </p:nvSpPr>
+        <p:spPr>
+          <a:xfrm>
+            <a:off x="841248" y="4087368"/>
+            <a:ext cx="4791456" cy="310896"/>
+          </a:xfrm>
+          <a:prstGeom prst="rect">
+            <a:avLst/>
+          </a:prstGeom>
+          <a:noFill/>
+          <a:ln/>
+        </p:spPr>
+        <p:txBody>
+          <a:bodyPr wrap="square" lIns="0" tIns="0" rIns="0" bIns="0" rtlCol="0" anchor="ctr">
+            <a:normAutofit/>
+          </a:bodyPr>
+          <a:lstStyle/>
+          <a:p>
+            <a:pPr algn="ctr" indent="0" marL="0">
+              <a:buNone/>
+            </a:pPr>
+            <a:r>
+              <a:rPr lang="en-US" sz="1600" b="1" dirty="0">
+                <a:solidFill>
+                  <a:srgbClr val="656A70"/>
+                </a:solidFill>
+                <a:latin typeface="FlandersArtSans-Bold" pitchFamily="34" charset="0"/>
+                <a:ea typeface="FlandersArtSans-Bold" pitchFamily="34" charset="-122"/>
+                <a:cs typeface="FlandersArtSans-Bold" pitchFamily="34" charset="-120"/>
+              </a:rPr>
+              <a:t>Static placement</a:t>
+            </a:r>
+            <a:endParaRPr lang="en-US" sz="1600" dirty="0"/>
+          </a:p>
+        </p:txBody>
+      </p:sp>
+      <p:sp>
+        <p:nvSpPr>
+          <p:cNvPr id="13" name="Shape 11"/>
+          <p:cNvSpPr/>
+          <p:nvPr/>
+        </p:nvSpPr>
+        <p:spPr>
+          <a:xfrm>
+            <a:off x="6099048" y="1115568"/>
+            <a:ext cx="0" cy="3959352"/>
+          </a:xfrm>
+          <a:prstGeom prst="line">
+            <a:avLst/>
+          </a:prstGeom>
+          <a:noFill/>
+          <a:ln w="12700">
+            <a:solidFill>
+              <a:srgbClr val="C7CBD2"/>
+            </a:solidFill>
+            <a:prstDash val="solid"/>
+          </a:ln>
+        </p:spPr>
+      </p:sp>
+      <p:sp>
+        <p:nvSpPr>
+          <p:cNvPr id="14" name="Text 12"/>
+          <p:cNvSpPr/>
+          <p:nvPr/>
+        </p:nvSpPr>
+        <p:spPr>
+          <a:xfrm>
+            <a:off x="6364224" y="1143000"/>
+            <a:ext cx="5120640" cy="310896"/>
+          </a:xfrm>
+          <a:prstGeom prst="rect">
+            <a:avLst/>
+          </a:prstGeom>
+          <a:noFill/>
+          <a:ln/>
+        </p:spPr>
+        <p:txBody>
+          <a:bodyPr wrap="square" lIns="0" tIns="0" rIns="0" bIns="0" rtlCol="0" anchor="ctr">
+            <a:normAutofit/>
+          </a:bodyPr>
+          <a:lstStyle/>
+          <a:p>
+            <a:pPr algn="l" indent="0" marL="0">
+              <a:buNone/>
+            </a:pPr>
+            <a:r>
+              <a:rPr lang="en-US" sz="1600" b="1" dirty="0">
+                <a:solidFill>
+                  <a:srgbClr val="DB6C30"/>
+                </a:solidFill>
+                <a:latin typeface="FlandersArtSans-Bold" pitchFamily="34" charset="0"/>
+                <a:ea typeface="FlandersArtSans-Bold" pitchFamily="34" charset="-122"/>
+                <a:cs typeface="FlandersArtSans-Bold" pitchFamily="34" charset="-120"/>
+              </a:rPr>
+              <a:t>B  STREAM WEIGHTS TO THE GPU</a:t>
+            </a:r>
+            <a:endParaRPr lang="en-US" sz="1600" dirty="0"/>
+          </a:p>
+        </p:txBody>
+      </p:sp>
+      <p:sp>
+        <p:nvSpPr>
+          <p:cNvPr id="15" name="Text 13"/>
+          <p:cNvSpPr/>
+          <p:nvPr/>
+        </p:nvSpPr>
+        <p:spPr>
+          <a:xfrm>
+            <a:off x="6364224" y="1481328"/>
+            <a:ext cx="5120640" cy="347472"/>
+          </a:xfrm>
+          <a:prstGeom prst="rect">
+            <a:avLst/>
+          </a:prstGeom>
+          <a:noFill/>
+          <a:ln/>
+        </p:spPr>
+        <p:txBody>
+          <a:bodyPr wrap="square" lIns="0" tIns="0" rIns="0" bIns="0" rtlCol="0" anchor="ctr">
+            <a:normAutofit/>
+          </a:bodyPr>
+          <a:lstStyle/>
+          <a:p>
+            <a:pPr algn="l" indent="0" marL="0">
+              <a:buNone/>
+            </a:pPr>
+            <a:r>
+              <a:rPr lang="en-US" sz="1900" b="1" dirty="0">
+                <a:solidFill>
+                  <a:srgbClr val="333639"/>
+                </a:solidFill>
+                <a:latin typeface="FlandersArtSans-Bold" pitchFamily="34" charset="0"/>
+                <a:ea typeface="FlandersArtSans-Bold" pitchFamily="34" charset="-122"/>
+                <a:cs typeface="FlandersArtSans-Bold" pitchFamily="34" charset="-120"/>
+              </a:rPr>
+              <a:t>GPU computes each layer as weights arrive</a:t>
+            </a:r>
+            <a:endParaRPr lang="en-US" sz="1900" dirty="0"/>
+          </a:p>
+        </p:txBody>
+      </p:sp>
+      <p:sp>
+        <p:nvSpPr>
+          <p:cNvPr id="16" name="Text 14"/>
+          <p:cNvSpPr/>
+          <p:nvPr/>
+        </p:nvSpPr>
+        <p:spPr>
+          <a:xfrm>
+            <a:off x="6364224" y="1847088"/>
+            <a:ext cx="5120640" cy="640080"/>
+          </a:xfrm>
+          <a:prstGeom prst="rect">
+            <a:avLst/>
+          </a:prstGeom>
+          <a:noFill/>
+          <a:ln/>
+        </p:spPr>
+        <p:txBody>
+          <a:bodyPr wrap="square" lIns="0" tIns="0" rIns="0" bIns="0" rtlCol="0" anchor="t">
+            <a:normAutofit/>
+          </a:bodyPr>
+          <a:lstStyle/>
+          <a:p>
+            <a:pPr algn="l" indent="0" marL="0">
+              <a:buNone/>
+            </a:pPr>
+            <a:r>
+              <a:rPr lang="en-US" sz="1600" dirty="0">
+                <a:solidFill>
+                  <a:srgbClr val="656A70"/>
+                </a:solidFill>
+                <a:latin typeface="FlandersArtSans-Regular" pitchFamily="34" charset="0"/>
+                <a:ea typeface="FlandersArtSans-Regular" pitchFamily="34" charset="-122"/>
+                <a:cs typeface="FlandersArtSans-Regular" pitchFamily="34" charset="-120"/>
+              </a:rPr>
+              <a:t>Inactive weights stay in RAM or NVMe; prefetching tries to hide transfer time.</a:t>
+            </a:r>
+            <a:endParaRPr lang="en-US" sz="1600" dirty="0"/>
+          </a:p>
+        </p:txBody>
+      </p:sp>
+      <p:sp>
+        <p:nvSpPr>
+          <p:cNvPr id="17" name="Shape 15"/>
+          <p:cNvSpPr/>
+          <p:nvPr/>
+        </p:nvSpPr>
+        <p:spPr>
+          <a:xfrm>
+            <a:off x="6565392" y="2816352"/>
+            <a:ext cx="1810512" cy="987552"/>
+          </a:xfrm>
+          <a:prstGeom prst="rect">
+            <a:avLst/>
+          </a:prstGeom>
+          <a:solidFill>
+            <a:srgbClr val="ECEEF1"/>
+          </a:solidFill>
+          <a:ln w="12700">
+            <a:solidFill>
+              <a:srgbClr val="C7CBD2"/>
+            </a:solidFill>
+            <a:prstDash val="solid"/>
+          </a:ln>
+        </p:spPr>
+      </p:sp>
+      <p:sp>
+        <p:nvSpPr>
+          <p:cNvPr id="18" name="Text 16"/>
+          <p:cNvSpPr/>
+          <p:nvPr/>
+        </p:nvSpPr>
+        <p:spPr>
+          <a:xfrm>
+            <a:off x="6675120" y="2862072"/>
+            <a:ext cx="1591056" cy="896112"/>
+          </a:xfrm>
+          <a:prstGeom prst="rect">
+            <a:avLst/>
+          </a:prstGeom>
+          <a:noFill/>
+          <a:ln/>
+        </p:spPr>
+        <p:txBody>
+          <a:bodyPr wrap="square" lIns="0" tIns="0" rIns="0" bIns="0" rtlCol="0" anchor="ctr">
+            <a:normAutofit/>
+          </a:bodyPr>
+          <a:lstStyle/>
+          <a:p>
+            <a:pPr algn="ctr" indent="0" marL="0">
+              <a:buNone/>
+            </a:pPr>
+            <a:r>
+              <a:rPr lang="en-US" sz="1600" b="1" dirty="0">
+                <a:solidFill>
+                  <a:srgbClr val="333639"/>
+                </a:solidFill>
+                <a:latin typeface="FlandersArtSans-Bold" pitchFamily="34" charset="0"/>
+                <a:ea typeface="FlandersArtSans-Bold" pitchFamily="34" charset="-122"/>
+                <a:cs typeface="FlandersArtSans-Bold" pitchFamily="34" charset="-120"/>
+              </a:rPr>
+              <a:t>Inactive layer</a:t>
+            </a:r>
+            <a:endParaRPr lang="en-US" sz="1600" dirty="0"/>
+          </a:p>
+          <a:p>
+            <a:pPr algn="ctr" indent="0" marL="0">
+              <a:buNone/>
+            </a:pPr>
+            <a:r>
+              <a:rPr lang="en-US" sz="1600" b="1" dirty="0">
+                <a:solidFill>
+                  <a:srgbClr val="333639"/>
+                </a:solidFill>
+                <a:latin typeface="FlandersArtSans-Bold" pitchFamily="34" charset="0"/>
+                <a:ea typeface="FlandersArtSans-Bold" pitchFamily="34" charset="-122"/>
+                <a:cs typeface="FlandersArtSans-Bold" pitchFamily="34" charset="-120"/>
+              </a:rPr>
+              <a:t>weights in RAM</a:t>
+            </a:r>
+            <a:endParaRPr lang="en-US" sz="1600" dirty="0"/>
+          </a:p>
+        </p:txBody>
+      </p:sp>
+      <p:sp>
+        <p:nvSpPr>
+          <p:cNvPr id="19" name="Shape 17"/>
+          <p:cNvSpPr/>
+          <p:nvPr/>
+        </p:nvSpPr>
+        <p:spPr>
+          <a:xfrm>
+            <a:off x="9582912" y="2816352"/>
+            <a:ext cx="1737360" cy="987552"/>
+          </a:xfrm>
+          <a:prstGeom prst="rect">
+            <a:avLst/>
+          </a:prstGeom>
+          <a:solidFill>
+            <a:srgbClr val="F8E7DD"/>
+          </a:solidFill>
+          <a:ln w="12700">
+            <a:solidFill>
+              <a:srgbClr val="DB6C30"/>
+            </a:solidFill>
+            <a:prstDash val="solid"/>
+          </a:ln>
+        </p:spPr>
+      </p:sp>
+      <p:sp>
+        <p:nvSpPr>
+          <p:cNvPr id="20" name="Text 18"/>
+          <p:cNvSpPr/>
+          <p:nvPr/>
+        </p:nvSpPr>
+        <p:spPr>
+          <a:xfrm>
+            <a:off x="9692640" y="2862072"/>
+            <a:ext cx="1517904" cy="896112"/>
+          </a:xfrm>
+          <a:prstGeom prst="rect">
+            <a:avLst/>
+          </a:prstGeom>
+          <a:noFill/>
+          <a:ln/>
+        </p:spPr>
+        <p:txBody>
+          <a:bodyPr wrap="square" lIns="0" tIns="0" rIns="0" bIns="0" rtlCol="0" anchor="ctr">
+            <a:normAutofit/>
+          </a:bodyPr>
+          <a:lstStyle/>
+          <a:p>
+            <a:pPr algn="ctr" indent="0" marL="0">
+              <a:buNone/>
+            </a:pPr>
+            <a:r>
+              <a:rPr lang="en-US" sz="1600" b="1" dirty="0">
+                <a:solidFill>
+                  <a:srgbClr val="333639"/>
+                </a:solidFill>
+                <a:latin typeface="FlandersArtSans-Bold" pitchFamily="34" charset="0"/>
+                <a:ea typeface="FlandersArtSans-Bold" pitchFamily="34" charset="-122"/>
+                <a:cs typeface="FlandersArtSans-Bold" pitchFamily="34" charset="-120"/>
+              </a:rPr>
+              <a:t>Current layer</a:t>
+            </a:r>
+            <a:endParaRPr lang="en-US" sz="1600" dirty="0"/>
+          </a:p>
+          <a:p>
+            <a:pPr algn="ctr" indent="0" marL="0">
+              <a:buNone/>
+            </a:pPr>
+            <a:r>
+              <a:rPr lang="en-US" sz="1600" b="1" dirty="0">
+                <a:solidFill>
+                  <a:srgbClr val="333639"/>
+                </a:solidFill>
+                <a:latin typeface="FlandersArtSans-Bold" pitchFamily="34" charset="0"/>
+                <a:ea typeface="FlandersArtSans-Bold" pitchFamily="34" charset="-122"/>
+                <a:cs typeface="FlandersArtSans-Bold" pitchFamily="34" charset="-120"/>
+              </a:rPr>
+              <a:t>GPU compute</a:t>
+            </a:r>
+            <a:endParaRPr lang="en-US" sz="1600" dirty="0"/>
+          </a:p>
+        </p:txBody>
+      </p:sp>
+      <p:sp>
+        <p:nvSpPr>
+          <p:cNvPr id="21" name="Shape 19"/>
+          <p:cNvSpPr/>
+          <p:nvPr/>
+        </p:nvSpPr>
+        <p:spPr>
+          <a:xfrm>
+            <a:off x="8412480" y="3310128"/>
+            <a:ext cx="1115568" cy="0"/>
+          </a:xfrm>
+          <a:prstGeom prst="line">
+            <a:avLst/>
+          </a:prstGeom>
+          <a:noFill/>
+          <a:ln w="19050">
+            <a:solidFill>
+              <a:srgbClr val="DB6C30"/>
+            </a:solidFill>
+            <a:prstDash val="solid"/>
+            <a:tailEnd type="triangle"/>
+          </a:ln>
+        </p:spPr>
+      </p:sp>
+      <p:sp>
+        <p:nvSpPr>
+          <p:cNvPr id="22" name="Text 20"/>
+          <p:cNvSpPr/>
+          <p:nvPr/>
+        </p:nvSpPr>
+        <p:spPr>
+          <a:xfrm>
+            <a:off x="8439912" y="2944368"/>
+            <a:ext cx="1051560" cy="256032"/>
+          </a:xfrm>
+          <a:prstGeom prst="rect">
+            <a:avLst/>
+          </a:prstGeom>
+          <a:noFill/>
+          <a:ln/>
+        </p:spPr>
+        <p:txBody>
+          <a:bodyPr wrap="square" lIns="0" tIns="0" rIns="0" bIns="0" rtlCol="0" anchor="ctr">
+            <a:normAutofit/>
+          </a:bodyPr>
+          <a:lstStyle/>
+          <a:p>
+            <a:pPr algn="ctr" indent="0" marL="0">
+              <a:buNone/>
+            </a:pPr>
+            <a:r>
+              <a:rPr lang="en-US" sz="1600" b="1" dirty="0">
+                <a:solidFill>
+                  <a:srgbClr val="DB6C30"/>
+                </a:solidFill>
+                <a:latin typeface="FlandersArtSans-Bold" pitchFamily="34" charset="0"/>
+                <a:ea typeface="FlandersArtSans-Bold" pitchFamily="34" charset="-122"/>
+                <a:cs typeface="FlandersArtSans-Bold" pitchFamily="34" charset="-120"/>
+              </a:rPr>
+              <a:t>prefetch</a:t>
+            </a:r>
+            <a:endParaRPr lang="en-US" sz="1600" dirty="0"/>
+          </a:p>
+        </p:txBody>
+      </p:sp>
+      <p:sp>
+        <p:nvSpPr>
+          <p:cNvPr id="23" name="Text 21"/>
+          <p:cNvSpPr/>
+          <p:nvPr/>
+        </p:nvSpPr>
+        <p:spPr>
+          <a:xfrm>
+            <a:off x="6565392" y="4087368"/>
+            <a:ext cx="4754880" cy="310896"/>
+          </a:xfrm>
+          <a:prstGeom prst="rect">
+            <a:avLst/>
+          </a:prstGeom>
+          <a:noFill/>
+          <a:ln/>
+        </p:spPr>
+        <p:txBody>
+          <a:bodyPr wrap="square" lIns="0" tIns="0" rIns="0" bIns="0" rtlCol="0" anchor="ctr">
+            <a:normAutofit/>
+          </a:bodyPr>
+          <a:lstStyle/>
+          <a:p>
+            <a:pPr algn="ctr" indent="0" marL="0">
+              <a:buNone/>
+            </a:pPr>
+            <a:r>
+              <a:rPr lang="en-US" sz="1600" b="1" dirty="0">
+                <a:solidFill>
+                  <a:srgbClr val="656A70"/>
+                </a:solidFill>
+                <a:latin typeface="FlandersArtSans-Bold" pitchFamily="34" charset="0"/>
+                <a:ea typeface="FlandersArtSans-Bold" pitchFamily="34" charset="-122"/>
+                <a:cs typeface="FlandersArtSans-Bold" pitchFamily="34" charset="-120"/>
+              </a:rPr>
+              <a:t>Release the GPU copy after use</a:t>
+            </a:r>
+            <a:endParaRPr lang="en-US" sz="1600" dirty="0"/>
+          </a:p>
+        </p:txBody>
+      </p:sp>
+      <p:sp>
+        <p:nvSpPr>
+          <p:cNvPr id="24" name="Shape 22"/>
+          <p:cNvSpPr/>
+          <p:nvPr/>
+        </p:nvSpPr>
+        <p:spPr>
+          <a:xfrm>
+            <a:off x="658368" y="5074920"/>
+            <a:ext cx="10826496" cy="0"/>
+          </a:xfrm>
+          <a:prstGeom prst="line">
+            <a:avLst/>
+          </a:prstGeom>
+          <a:noFill/>
+          <a:ln w="12700">
+            <a:solidFill>
+              <a:srgbClr val="C7CBD2"/>
+            </a:solidFill>
+            <a:prstDash val="solid"/>
+          </a:ln>
+        </p:spPr>
+      </p:sp>
+      <p:sp>
+        <p:nvSpPr>
+          <p:cNvPr id="25" name="Text 23"/>
+          <p:cNvSpPr/>
+          <p:nvPr/>
+        </p:nvSpPr>
+        <p:spPr>
+          <a:xfrm>
+            <a:off x="822960" y="5266944"/>
+            <a:ext cx="10497312" cy="603504"/>
+          </a:xfrm>
+          <a:prstGeom prst="rect">
+            <a:avLst/>
+          </a:prstGeom>
+          <a:noFill/>
+          <a:ln/>
+        </p:spPr>
+        <p:txBody>
+          <a:bodyPr wrap="square" lIns="0" tIns="0" rIns="0" bIns="0" rtlCol="0" anchor="ctr">
+            <a:normAutofit/>
+          </a:bodyPr>
+          <a:lstStyle/>
+          <a:p>
+            <a:pPr algn="ctr" indent="0" marL="0">
+              <a:buNone/>
+            </a:pPr>
+            <a:r>
+              <a:rPr lang="en-US" sz="1600" b="1" dirty="0">
+                <a:solidFill>
+                  <a:srgbClr val="DB6C30"/>
+                </a:solidFill>
+                <a:latin typeface="FlandersArtSans-Bold" pitchFamily="34" charset="0"/>
+                <a:ea typeface="FlandersArtSans-Bold" pitchFamily="34" charset="-122"/>
+                <a:cs typeface="FlandersArtSans-Bold" pitchFamily="34" charset="-120"/>
+              </a:rPr>
+              <a:t>CPU execution avoids repeated weight transfers but spends CPU compute. Streaming preserves GPU math but can move model-sized data for every generated token.</a:t>
+            </a:r>
+            <a:endParaRPr lang="en-US" sz="1600" dirty="0"/>
+          </a:p>
+        </p:txBody>
+      </p:sp>
+      <p:sp>
+        <p:nvSpPr>
+          <p:cNvPr id="101" name="Slide Number Placeholder 101">
+            <a:extLst>
+              <a:ext uri="{FF2B5EF4-FFF2-40B4-BE49-F238E27FC236}">
+                <a16:creationId xmlns:a16="http://schemas.microsoft.com/office/drawing/2014/main" id="{055F00DA-BA1F-1800-8271-6B0ABAA2D996}"/>
+              </a:ext>
+            </a:extLst>
+          </p:cNvPr>
+          <p:cNvSpPr>
+            <a:spLocks noGrp="1"/>
+          </p:cNvSpPr>
+          <p:nvPr>
+            <p:ph type="sldNum" idx="12"/>
+          </p:nvPr>
+        </p:nvSpPr>
+        <p:spPr/>
+        <p:txBody>
+          <a:bodyPr/>
+          <a:lstStyle/>
+          <a:p>
+            <a:fld id="{00000000-0000-0000-0000-000000000101}" type="slidenum">
+              <a:t>14</a:t>
+            </a:fld>
+            <a:endParaRPr/>
+          </a:p>
+        </p:txBody>
+      </p:sp>
+    </p:spTree>
   </p:cSld>
   <p:clrMapOvr>
     <a:masterClrMapping/>
